--- a/參考資料/Slide_260418-外銷訂單處理流程升級版.pptx
+++ b/參考資料/Slide_260418-外銷訂單處理流程升級版.pptx
@@ -13,6 +13,8 @@
     <p:sldId id="261" r:id="rId12"/>
     <p:sldId id="262" r:id="rId13"/>
     <p:sldId id="263" r:id="rId14"/>
+    <p:sldId id="264" r:id="rId15"/>
+    <p:sldId id="265" r:id="rId16"/>
   </p:sldIdLst>
   <p:sldSz cx="9900000" cy="6876000" type="screen4x3"/>
   <p:notesSz cx="6858000" cy="9144000"/>
@@ -3372,6 +3374,193 @@
 </p:sld>
 </file>
 
+<file path=ppt/slides/slide10.xml><?xml version="1.0" encoding="utf-8"?>
+<p:sld xmlns:a="http://schemas.openxmlformats.org/drawingml/2006/main" xmlns:p="http://schemas.openxmlformats.org/presentationml/2006/main" xmlns:r="http://schemas.openxmlformats.org/officeDocument/2006/relationships">
+  <p:cSld>
+    <p:spTree>
+      <p:nvGrpSpPr>
+        <p:cNvPr id="1" name=""/>
+        <p:cNvGrpSpPr/>
+        <p:nvPr/>
+      </p:nvGrpSpPr>
+      <p:grpSpPr/>
+      <p:sp>
+        <p:nvSpPr>
+          <p:cNvPr id="2" name="Rectangle 1"/>
+          <p:cNvSpPr/>
+          <p:nvPr/>
+        </p:nvSpPr>
+        <p:spPr>
+          <a:xfrm>
+            <a:off x="0" y="0"/>
+            <a:ext cx="9900000" cy="864000"/>
+          </a:xfrm>
+          <a:prstGeom prst="rect">
+            <a:avLst/>
+          </a:prstGeom>
+          <a:solidFill>
+            <a:srgbClr val="0850D0"/>
+          </a:solidFill>
+          <a:ln>
+            <a:noFill/>
+          </a:ln>
+        </p:spPr>
+        <p:style>
+          <a:lnRef idx="1">
+            <a:schemeClr val="accent1"/>
+          </a:lnRef>
+          <a:fillRef idx="3">
+            <a:schemeClr val="accent1"/>
+          </a:fillRef>
+          <a:effectRef idx="2">
+            <a:schemeClr val="accent1"/>
+          </a:effectRef>
+          <a:fontRef idx="minor">
+            <a:schemeClr val="lt1"/>
+          </a:fontRef>
+        </p:style>
+        <p:txBody>
+          <a:bodyPr rtlCol="0" anchor="ctr"/>
+          <a:lstStyle/>
+          <a:p>
+            <a:pPr algn="ctr"/>
+          </a:p>
+        </p:txBody>
+      </p:sp>
+      <p:sp>
+        <p:nvSpPr>
+          <p:cNvPr id="3" name="Rectangle 2"/>
+          <p:cNvSpPr/>
+          <p:nvPr/>
+        </p:nvSpPr>
+        <p:spPr>
+          <a:xfrm>
+            <a:off x="0" y="864000"/>
+            <a:ext cx="9900000" cy="6012000"/>
+          </a:xfrm>
+          <a:prstGeom prst="rect">
+            <a:avLst/>
+          </a:prstGeom>
+          <a:solidFill>
+            <a:srgbClr val="F5F7FF"/>
+          </a:solidFill>
+          <a:ln>
+            <a:noFill/>
+          </a:ln>
+        </p:spPr>
+        <p:style>
+          <a:lnRef idx="1">
+            <a:schemeClr val="accent1"/>
+          </a:lnRef>
+          <a:fillRef idx="3">
+            <a:schemeClr val="accent1"/>
+          </a:fillRef>
+          <a:effectRef idx="2">
+            <a:schemeClr val="accent1"/>
+          </a:effectRef>
+          <a:fontRef idx="minor">
+            <a:schemeClr val="lt1"/>
+          </a:fontRef>
+        </p:style>
+        <p:txBody>
+          <a:bodyPr rtlCol="0" anchor="ctr"/>
+          <a:lstStyle/>
+          <a:p>
+            <a:pPr algn="ctr"/>
+          </a:p>
+        </p:txBody>
+      </p:sp>
+      <p:sp>
+        <p:nvSpPr>
+          <p:cNvPr id="4" name="TextBox 3"/>
+          <p:cNvSpPr txBox="1"/>
+          <p:nvPr/>
+        </p:nvSpPr>
+        <p:spPr>
+          <a:xfrm>
+            <a:off x="288000" y="162000"/>
+            <a:ext cx="8100000" cy="540000"/>
+          </a:xfrm>
+          <a:prstGeom prst="rect">
+            <a:avLst/>
+          </a:prstGeom>
+          <a:noFill/>
+        </p:spPr>
+        <p:txBody>
+          <a:bodyPr wrap="square">
+            <a:spAutoFit/>
+          </a:bodyPr>
+          <a:lstStyle/>
+          <a:p>
+            <a:pPr algn="l"/>
+            <a:r>
+              <a:rPr sz="2200" b="1" i="0">
+                <a:solidFill>
+                  <a:srgbClr val="FFFFFF"/>
+                </a:solidFill>
+                <a:latin typeface="微軟正黑體"/>
+              </a:rPr>
+              <a:t>業務工具箱儀表板　·　訂 ／ 寫 ／ 收　示意</a:t>
+            </a:r>
+          </a:p>
+        </p:txBody>
+      </p:sp>
+      <p:pic>
+        <p:nvPicPr>
+          <p:cNvPr id="5" name="Picture 4" descr="dashboard_02_訂寫.png"/>
+          <p:cNvPicPr>
+            <a:picLocks noChangeAspect="1"/>
+          </p:cNvPicPr>
+          <p:nvPr/>
+        </p:nvPicPr>
+        <p:blipFill>
+          <a:blip r:embed="rId2"/>
+          <a:stretch>
+            <a:fillRect/>
+          </a:stretch>
+        </p:blipFill>
+        <p:spPr>
+          <a:xfrm>
+            <a:off x="216000" y="972000"/>
+            <a:ext cx="5940000" cy="3509169"/>
+          </a:xfrm>
+          <a:prstGeom prst="rect">
+            <a:avLst/>
+          </a:prstGeom>
+        </p:spPr>
+      </p:pic>
+      <p:pic>
+        <p:nvPicPr>
+          <p:cNvPr id="6" name="Picture 5" descr="dashboard_03_收.png"/>
+          <p:cNvPicPr>
+            <a:picLocks noChangeAspect="1"/>
+          </p:cNvPicPr>
+          <p:nvPr/>
+        </p:nvPicPr>
+        <p:blipFill>
+          <a:blip r:embed="rId3"/>
+          <a:stretch>
+            <a:fillRect/>
+          </a:stretch>
+        </p:blipFill>
+        <p:spPr>
+          <a:xfrm>
+            <a:off x="6138000" y="972000"/>
+            <a:ext cx="3564000" cy="1644923"/>
+          </a:xfrm>
+          <a:prstGeom prst="rect">
+            <a:avLst/>
+          </a:prstGeom>
+        </p:spPr>
+      </p:pic>
+    </p:spTree>
+  </p:cSld>
+  <p:clrMapOvr>
+    <a:masterClrMapping/>
+  </p:clrMapOvr>
+</p:sld>
+</file>
+
 <file path=ppt/slides/slide2.xml><?xml version="1.0" encoding="utf-8"?>
 <p:sld xmlns:a="http://schemas.openxmlformats.org/drawingml/2006/main" xmlns:p="http://schemas.openxmlformats.org/presentationml/2006/main" xmlns:r="http://schemas.openxmlformats.org/officeDocument/2006/relationships">
   <p:cSld>
@@ -9021,6 +9210,169 @@
           </a:p>
         </p:txBody>
       </p:sp>
+    </p:spTree>
+  </p:cSld>
+  <p:clrMapOvr>
+    <a:masterClrMapping/>
+  </p:clrMapOvr>
+</p:sld>
+</file>
+
+<file path=ppt/slides/slide9.xml><?xml version="1.0" encoding="utf-8"?>
+<p:sld xmlns:a="http://schemas.openxmlformats.org/drawingml/2006/main" xmlns:p="http://schemas.openxmlformats.org/presentationml/2006/main" xmlns:r="http://schemas.openxmlformats.org/officeDocument/2006/relationships">
+  <p:cSld>
+    <p:spTree>
+      <p:nvGrpSpPr>
+        <p:cNvPr id="1" name=""/>
+        <p:cNvGrpSpPr/>
+        <p:nvPr/>
+      </p:nvGrpSpPr>
+      <p:grpSpPr/>
+      <p:sp>
+        <p:nvSpPr>
+          <p:cNvPr id="2" name="Rectangle 1"/>
+          <p:cNvSpPr/>
+          <p:nvPr/>
+        </p:nvSpPr>
+        <p:spPr>
+          <a:xfrm>
+            <a:off x="0" y="0"/>
+            <a:ext cx="9900000" cy="864000"/>
+          </a:xfrm>
+          <a:prstGeom prst="rect">
+            <a:avLst/>
+          </a:prstGeom>
+          <a:solidFill>
+            <a:srgbClr val="0850D0"/>
+          </a:solidFill>
+          <a:ln>
+            <a:noFill/>
+          </a:ln>
+        </p:spPr>
+        <p:style>
+          <a:lnRef idx="1">
+            <a:schemeClr val="accent1"/>
+          </a:lnRef>
+          <a:fillRef idx="3">
+            <a:schemeClr val="accent1"/>
+          </a:fillRef>
+          <a:effectRef idx="2">
+            <a:schemeClr val="accent1"/>
+          </a:effectRef>
+          <a:fontRef idx="minor">
+            <a:schemeClr val="lt1"/>
+          </a:fontRef>
+        </p:style>
+        <p:txBody>
+          <a:bodyPr rtlCol="0" anchor="ctr"/>
+          <a:lstStyle/>
+          <a:p>
+            <a:pPr algn="ctr"/>
+          </a:p>
+        </p:txBody>
+      </p:sp>
+      <p:sp>
+        <p:nvSpPr>
+          <p:cNvPr id="3" name="Rectangle 2"/>
+          <p:cNvSpPr/>
+          <p:nvPr/>
+        </p:nvSpPr>
+        <p:spPr>
+          <a:xfrm>
+            <a:off x="0" y="864000"/>
+            <a:ext cx="9900000" cy="6012000"/>
+          </a:xfrm>
+          <a:prstGeom prst="rect">
+            <a:avLst/>
+          </a:prstGeom>
+          <a:solidFill>
+            <a:srgbClr val="F5F7FF"/>
+          </a:solidFill>
+          <a:ln>
+            <a:noFill/>
+          </a:ln>
+        </p:spPr>
+        <p:style>
+          <a:lnRef idx="1">
+            <a:schemeClr val="accent1"/>
+          </a:lnRef>
+          <a:fillRef idx="3">
+            <a:schemeClr val="accent1"/>
+          </a:fillRef>
+          <a:effectRef idx="2">
+            <a:schemeClr val="accent1"/>
+          </a:effectRef>
+          <a:fontRef idx="minor">
+            <a:schemeClr val="lt1"/>
+          </a:fontRef>
+        </p:style>
+        <p:txBody>
+          <a:bodyPr rtlCol="0" anchor="ctr"/>
+          <a:lstStyle/>
+          <a:p>
+            <a:pPr algn="ctr"/>
+          </a:p>
+        </p:txBody>
+      </p:sp>
+      <p:sp>
+        <p:nvSpPr>
+          <p:cNvPr id="4" name="TextBox 3"/>
+          <p:cNvSpPr txBox="1"/>
+          <p:nvPr/>
+        </p:nvSpPr>
+        <p:spPr>
+          <a:xfrm>
+            <a:off x="288000" y="162000"/>
+            <a:ext cx="8100000" cy="540000"/>
+          </a:xfrm>
+          <a:prstGeom prst="rect">
+            <a:avLst/>
+          </a:prstGeom>
+          <a:noFill/>
+        </p:spPr>
+        <p:txBody>
+          <a:bodyPr wrap="square">
+            <a:spAutoFit/>
+          </a:bodyPr>
+          <a:lstStyle/>
+          <a:p>
+            <a:pPr algn="l"/>
+            <a:r>
+              <a:rPr sz="2200" b="1" i="0">
+                <a:solidFill>
+                  <a:srgbClr val="FFFFFF"/>
+                </a:solidFill>
+                <a:latin typeface="微軟正黑體"/>
+              </a:rPr>
+              <a:t>業務工具箱儀表板　·　算 ／ KEY　示意</a:t>
+            </a:r>
+          </a:p>
+        </p:txBody>
+      </p:sp>
+      <p:pic>
+        <p:nvPicPr>
+          <p:cNvPr id="5" name="Picture 4" descr="dashboard_01_算KEY.png"/>
+          <p:cNvPicPr>
+            <a:picLocks noChangeAspect="1"/>
+          </p:cNvPicPr>
+          <p:nvPr/>
+        </p:nvPicPr>
+        <p:blipFill>
+          <a:blip r:embed="rId2"/>
+          <a:stretch>
+            <a:fillRect/>
+          </a:stretch>
+        </p:blipFill>
+        <p:spPr>
+          <a:xfrm>
+            <a:off x="288000" y="972000"/>
+            <a:ext cx="9324000" cy="8262498"/>
+          </a:xfrm>
+          <a:prstGeom prst="rect">
+            <a:avLst/>
+          </a:prstGeom>
+        </p:spPr>
+      </p:pic>
     </p:spTree>
   </p:cSld>
   <p:clrMapOvr>
